--- a/decks/geog-weather-hazards/geog-weather-hazards_ch3_effects-responses.pptx
+++ b/decks/geog-weather-hazards/geog-weather-hazards_ch3_effects-responses.pptx
@@ -126,30 +126,30 @@
   <p:extLst>
     <p:ext uri="{521415D9-36F7-43E2-AB2F-B90AF26B5E84}">
       <p14:sectionLst xmlns:p14="http://schemas.microsoft.com/office/powerpoint/2010/main">
-        <p14:section name="Opening" id="{eb8f24c6-883e-7086-c59e-18e8a9447527}">
+        <p14:section name="Opening" id="{f99d6f2c-5a34-af30-2982-d8582891e8a4}">
           <p14:sldIdLst>
             <p14:sldId id="256"/>
           </p14:sldIdLst>
         </p14:section>
-        <p14:section name="Gate" id="{b34bee70-e966-d179-d0b1-35389346a3e6}">
+        <p14:section name="Gate" id="{57a58df6-c941-cfaf-141d-1fec33d5435b}">
           <p14:sldIdLst>
             <p14:sldId id="257"/>
             <p14:sldId id="258"/>
           </p14:sldIdLst>
         </p14:section>
-        <p14:section name="Pre-teach" id="{d6659f2a-fe95-1dfe-4cc2-c34d5ef2b79a}">
+        <p14:section name="Pre-teach" id="{94b68a87-2b77-772d-5e8f-34abbcecefce}">
           <p14:sldIdLst>
             <p14:sldId id="259"/>
             <p14:sldId id="260"/>
           </p14:sldIdLst>
         </p14:section>
-        <p14:section name="Read-along" id="{18a7b5c9-c50d-4273-edfd-a308c5ba9da5}">
+        <p14:section name="Read-along" id="{e1421300-3416-d678-c1e0-a0e30daf63a2}">
           <p14:sldIdLst>
             <p14:sldId id="261"/>
             <p14:sldId id="262"/>
           </p14:sldIdLst>
         </p14:section>
-        <p14:section name="Teach" id="{d5199901-3928-576a-2ffd-d237378473bc}">
+        <p14:section name="Teach" id="{df985d09-8ad2-aba1-a818-e4add47dd80c}">
           <p14:sldIdLst>
             <p14:sldId id="263"/>
             <p14:sldId id="264"/>
@@ -158,7 +158,7 @@
             <p14:sldId id="267"/>
           </p14:sldIdLst>
         </p14:section>
-        <p14:section name="Routes" id="{512d7699-7aec-c869-0b65-2a7931c8ba0f}">
+        <p14:section name="Routes" id="{3577cb44-c9a2-f879-ac6b-ab28c90aeae1}">
           <p14:sldIdLst>
             <p14:sldId id="268"/>
             <p14:sldId id="269"/>
@@ -166,12 +166,12 @@
             <p14:sldId id="271"/>
           </p14:sldIdLst>
         </p14:section>
-        <p14:section name="Close" id="{64dcc6f6-688c-0e7e-f340-c40417128173}">
+        <p14:section name="Close" id="{c407c9ba-7b34-913d-8c1c-e7272003072f}">
           <p14:sldIdLst>
             <p14:sldId id="272"/>
           </p14:sldIdLst>
         </p14:section>
-        <p14:section name="Answers" id="{a9d63e21-29d6-aa41-4b9b-3376aacacba0}">
+        <p14:section name="Answers" id="{28ed352b-bfe0-2e7b-0b5e-d92271a8894f}">
           <p14:sldIdLst>
             <p14:sldId id="273"/>
             <p14:sldId id="274"/>
